--- a/Presentation_files/Presentation2.pptx
+++ b/Presentation_files/Presentation2.pptx
@@ -20,6 +20,9 @@
     <p:sldId id="268" r:id="rId14"/>
     <p:sldId id="269" r:id="rId15"/>
     <p:sldId id="270" r:id="rId16"/>
+    <p:sldId id="271" r:id="rId17"/>
+    <p:sldId id="272" r:id="rId18"/>
+    <p:sldId id="273" r:id="rId19"/>
   </p:sldIdLst>
   <p:sldSz cx="9144000" cy="5143500" type="screen16x9"/>
   <p:notesSz cx="6858000" cy="9144000"/>
@@ -3202,6 +3205,83 @@
             <p:ph type="title"/>
           </p:nvPr>
         </p:nvSpPr>
+        <p:spPr/>
+        <p:txBody>
+          <a:bodyPr/>
+          <a:lstStyle/>
+          <a:p>
+            <a:pPr lvl="0" indent="0" marL="0">
+              <a:buNone/>
+            </a:pPr>
+            <a:r>
+              <a:rPr/>
+              <a:t>Data Interaction</a:t>
+            </a:r>
+          </a:p>
+        </p:txBody>
+      </p:sp>
+      <p:pic>
+        <p:nvPicPr>
+          <p:cNvPr descr="Interaction.png" id="0" name="Picture 1"/>
+          <p:cNvPicPr>
+            <a:picLocks noGrp="1" noChangeAspect="1"/>
+          </p:cNvPicPr>
+          <p:nvPr/>
+        </p:nvPicPr>
+        <p:blipFill>
+          <a:blip r:embed="rId2"/>
+          <a:stretch>
+            <a:fillRect/>
+          </a:stretch>
+        </p:blipFill>
+        <p:spPr bwMode="auto">
+          <a:xfrm>
+            <a:off x="1955800" y="1193800"/>
+            <a:ext cx="5232400" cy="3390900"/>
+          </a:xfrm>
+          <a:prstGeom prst="rect">
+            <a:avLst/>
+          </a:prstGeom>
+          <a:noFill/>
+          <a:ln w="9525">
+            <a:noFill/>
+            <a:headEnd/>
+            <a:tailEnd/>
+          </a:ln>
+        </p:spPr>
+      </p:pic>
+    </p:spTree>
+  </p:cSld>
+</p:sld>
+</file>
+
+<file path=ppt/slides/slide11.xml><?xml version="1.0" encoding="utf-8"?>
+<p:sld xmlns:a="http://schemas.openxmlformats.org/drawingml/2006/main" xmlns:r="http://schemas.openxmlformats.org/officeDocument/2006/relationships" xmlns:p="http://schemas.openxmlformats.org/presentationml/2006/main">
+  <p:cSld>
+    <p:spTree>
+      <p:nvGrpSpPr>
+        <p:cNvPr id="1" name=""/>
+        <p:cNvGrpSpPr/>
+        <p:nvPr/>
+      </p:nvGrpSpPr>
+      <p:grpSpPr>
+        <a:xfrm>
+          <a:off x="0" y="0"/>
+          <a:ext cx="0" cy="0"/>
+          <a:chOff x="0" y="0"/>
+          <a:chExt cx="0" cy="0"/>
+        </a:xfrm>
+      </p:grpSpPr>
+      <p:sp>
+        <p:nvSpPr>
+          <p:cNvPr id="2" name="Title 1"/>
+          <p:cNvSpPr>
+            <a:spLocks noGrp="1"/>
+          </p:cNvSpPr>
+          <p:nvPr>
+            <p:ph type="title"/>
+          </p:nvPr>
+        </p:nvSpPr>
         <p:spPr>
           <a:xfrm>
             <a:off x="457201" y="204787"/>
@@ -3254,21 +3334,21 @@
             <a:pPr lvl="0"/>
             <a:r>
               <a:rPr/>
-              <a:t>Frequentist GLM estimates lack shrinkage and are more extreme at tails</a:t>
+              <a:t>Frequentist GLM estimates gives same result as conjugate vauge priors for Bayes</a:t>
             </a:r>
           </a:p>
           <a:p>
             <a:pPr lvl="0"/>
             <a:r>
               <a:rPr/>
-              <a:t>Plot shows frequentist vs Bayesian estimate for a single mid-player</a:t>
-            </a:r>
-          </a:p>
-          <a:p>
-            <a:pPr lvl="1"/>
+              <a:t>lacks shrinkage and are more extreme at tails</a:t>
+            </a:r>
+          </a:p>
+          <a:p>
+            <a:pPr lvl="0"/>
             <a:r>
               <a:rPr/>
-              <a:t>Notice that freqentist estimate is the same throughout all rank differences, whereas Bayesain estimate is more certain</a:t>
+              <a:t>Plot shows frequentist (Vague Prior) vs Bayesian (Strong Prior) estimate for a single mid-player</a:t>
             </a:r>
           </a:p>
         </p:txBody>
@@ -3289,8 +3369,8 @@
         </p:blipFill>
         <p:spPr bwMode="auto">
           <a:xfrm>
-            <a:off x="3568700" y="812800"/>
-            <a:ext cx="5105400" cy="3149600"/>
+            <a:off x="3568700" y="685800"/>
+            <a:ext cx="5105400" cy="3429000"/>
           </a:xfrm>
           <a:prstGeom prst="rect">
             <a:avLst/>
@@ -3586,7 +3666,7 @@
 </p:sld>
 </file>
 
-<file path=ppt/slides/slide11.xml><?xml version="1.0" encoding="utf-8"?>
+<file path=ppt/slides/slide12.xml><?xml version="1.0" encoding="utf-8"?>
 <p:sld xmlns:a="http://schemas.openxmlformats.org/drawingml/2006/main" xmlns:r="http://schemas.openxmlformats.org/officeDocument/2006/relationships" xmlns:p="http://schemas.openxmlformats.org/presentationml/2006/main">
   <p:cSld>
     <p:spTree>
@@ -3660,7 +3740,7 @@
             <a:pPr lvl="0"/>
             <a:r>
               <a:rPr/>
-              <a:t>Our model had accuracy of 61.2% and specificity of 54.4%</a:t>
+              <a:t>Our model had accuracy of 61.2% and sensitivity (true positive) of 54.4%</a:t>
             </a:r>
           </a:p>
           <a:p>
@@ -3674,7 +3754,7 @@
             <a:pPr lvl="1"/>
             <a:r>
               <a:rPr/>
-              <a:t>This model had accuracy of 55.9% but specificity of only 18.4%!!</a:t>
+              <a:t>Vague model had accuracy of 55.9% but sensitivity of only 18.4%!!</a:t>
             </a:r>
           </a:p>
         </p:txBody>
@@ -3962,7 +4042,7 @@
 </p:sld>
 </file>
 
-<file path=ppt/slides/slide12.xml><?xml version="1.0" encoding="utf-8"?>
+<file path=ppt/slides/slide13.xml><?xml version="1.0" encoding="utf-8"?>
 <p:sld xmlns:a="http://schemas.openxmlformats.org/drawingml/2006/main" xmlns:r="http://schemas.openxmlformats.org/officeDocument/2006/relationships" xmlns:p="http://schemas.openxmlformats.org/presentationml/2006/main">
   <p:cSld>
     <p:spTree>
@@ -3999,7 +4079,7 @@
             </a:pPr>
             <a:r>
               <a:rPr/>
-              <a:t>Summary (another plot?)</a:t>
+              <a:t>Who Should you Root for? (Summary of Fixed Effects)</a:t>
             </a:r>
           </a:p>
         </p:txBody>
@@ -4009,7 +4089,7 @@
 </p:sld>
 </file>
 
-<file path=ppt/slides/slide13.xml><?xml version="1.0" encoding="utf-8"?>
+<file path=ppt/slides/slide14.xml><?xml version="1.0" encoding="utf-8"?>
 <p:sld xmlns:a="http://schemas.openxmlformats.org/drawingml/2006/main" xmlns:r="http://schemas.openxmlformats.org/officeDocument/2006/relationships" xmlns:p="http://schemas.openxmlformats.org/presentationml/2006/main">
   <p:cSld>
     <p:spTree>
@@ -4329,7 +4409,59 @@
 </p:sld>
 </file>
 
-<file path=ppt/slides/slide14.xml><?xml version="1.0" encoding="utf-8"?>
+<file path=ppt/slides/slide15.xml><?xml version="1.0" encoding="utf-8"?>
+<p:sld xmlns:a="http://schemas.openxmlformats.org/drawingml/2006/main" xmlns:r="http://schemas.openxmlformats.org/officeDocument/2006/relationships" xmlns:p="http://schemas.openxmlformats.org/presentationml/2006/main">
+  <p:cSld>
+    <p:spTree>
+      <p:nvGrpSpPr>
+        <p:cNvPr id="1" name=""/>
+        <p:cNvGrpSpPr/>
+        <p:nvPr/>
+      </p:nvGrpSpPr>
+      <p:grpSpPr>
+        <a:xfrm>
+          <a:off x="0" y="0"/>
+          <a:ext cx="0" cy="0"/>
+          <a:chOff x="0" y="0"/>
+          <a:chExt cx="0" cy="0"/>
+        </a:xfrm>
+      </p:grpSpPr>
+      <p:sp>
+        <p:nvSpPr>
+          <p:cNvPr id="2" name="Title 1"/>
+          <p:cNvSpPr>
+            <a:spLocks noGrp="1"/>
+          </p:cNvSpPr>
+          <p:nvPr>
+            <p:ph type="title"/>
+          </p:nvPr>
+        </p:nvSpPr>
+        <p:spPr>
+          <a:xfrm>
+            <a:off x="722313" y="3305176"/>
+            <a:ext cx="7772400" cy="1021556"/>
+          </a:xfrm>
+        </p:spPr>
+        <p:txBody>
+          <a:bodyPr/>
+          <a:lstStyle/>
+          <a:p>
+            <a:pPr lvl="0" indent="0" marL="0">
+              <a:buNone/>
+            </a:pPr>
+            <a:r>
+              <a:rPr/>
+              <a:t>Programming Details (Extra information Slides)</a:t>
+            </a:r>
+          </a:p>
+        </p:txBody>
+      </p:sp>
+    </p:spTree>
+  </p:cSld>
+</p:sld>
+</file>
+
+<file path=ppt/slides/slide16.xml><?xml version="1.0" encoding="utf-8"?>
 <p:sld xmlns:a="http://schemas.openxmlformats.org/drawingml/2006/main" xmlns:r="http://schemas.openxmlformats.org/officeDocument/2006/relationships" xmlns:p="http://schemas.openxmlformats.org/presentationml/2006/main">
   <p:cSld>
     <p:spTree>
@@ -4366,7 +4498,7 @@
             </a:pPr>
             <a:r>
               <a:rPr/>
-              <a:t>Gory Details {visibility “uncounted”}</a:t>
+              <a:t>Random effects Model</a:t>
             </a:r>
           </a:p>
         </p:txBody>
@@ -4397,43 +4529,33 @@
               </a:rPr>
               <a:t>delta ~ dcat([1/3, 1/3, 1/3])</a:t>
             </a:r>
+          </a:p>
+          <a:p>
+            <a:pPr lvl="1"/>
             <a:r>
               <a:rPr/>
-              <a:t>; P(M1)=0.49, P(M2)=0.51, P(M3)≈0</a:t>
+              <a:t>Interaction: P(M1)=0.49, Additive: P(M2)=0.51, No fixed surface effect: P(M3)≈0</a:t>
             </a:r>
           </a:p>
           <a:p>
             <a:pPr lvl="0"/>
             <a:r>
               <a:rPr/>
-              <a:t>Priors on σ: Half-T(0,1,4) truncated at 0; tau = 1/σ² ~ Gamma(a,b) for mid model</a:t>
+              <a:t>Priors on σ: Half-T(0,1,4) truncated at 0</a:t>
             </a:r>
           </a:p>
           <a:p>
             <a:pPr lvl="0"/>
             <a:r>
               <a:rPr/>
-              <a:t>Gamma hyperparameters fit via MLE on top-player posteriors: </a:t>
-            </a:r>
-            <a:r>
-              <a:rPr>
-                <a:latin typeface="Courier"/>
-              </a:rPr>
-              <a:t>optim(BFGS)</a:t>
+              <a:t>Samples confirmed to converge via Gelman-Rubin R-hat &lt; 1.05</a:t>
             </a:r>
           </a:p>
           <a:p>
             <a:pPr lvl="0"/>
             <a:r>
               <a:rPr/>
-              <a:t>4 chains, 10k burn-in, 20k samples; Gelman-Rubin R-hat &lt; 1.05</a:t>
-            </a:r>
-          </a:p>
-          <a:p>
-            <a:pPr lvl="0"/>
-            <a:r>
-              <a:rPr/>
-              <a:t>Surface encoding: 1=Clay, 2=Grass, 3=Hard (alphabetical factor levels in R)</a:t>
+              <a:t>DIC: Interaction model 27820, Additive model 27927</a:t>
             </a:r>
           </a:p>
         </p:txBody>
@@ -4721,7 +4843,7 @@
 </p:sld>
 </file>
 
-<file path=ppt/slides/slide15.xml><?xml version="1.0" encoding="utf-8"?>
+<file path=ppt/slides/slide17.xml><?xml version="1.0" encoding="utf-8"?>
 <p:sld xmlns:a="http://schemas.openxmlformats.org/drawingml/2006/main" xmlns:r="http://schemas.openxmlformats.org/officeDocument/2006/relationships" xmlns:p="http://schemas.openxmlformats.org/presentationml/2006/main">
   <p:cSld>
     <p:spTree>
@@ -4758,7 +4880,7 @@
             </a:pPr>
             <a:r>
               <a:rPr/>
-              <a:t>Script</a:t>
+              <a:t>Extracting parameters</a:t>
             </a:r>
           </a:p>
         </p:txBody>
@@ -4778,45 +4900,762 @@
           <a:bodyPr/>
           <a:lstStyle/>
           <a:p>
-            <a:pPr lvl="0" indent="0" marL="0">
-              <a:buNone/>
-            </a:pPr>
-            <a:r>
-              <a:rPr i="1"/>
-              <a:t>Script:</a:t>
-            </a:r>
-          </a:p>
-          <a:p>
-            <a:pPr lvl="0" indent="0" marL="0">
-              <a:buNone/>
-            </a:pPr>
-            <a:r>
-              <a:rPr i="1"/>
-              <a:t>Imagine you turn on the TV and a game of tennis is playing. You don’t necessarily follow tennis very closely, but you like watching the games and you want to know who you should root for. This is really easy for the big names like Nadal, Federer, Djokovic, Alcaraz, but what about the smaller names? What if you want to root for the underdog, but don’t want to risk getting your hopes up for nothing?</a:t>
-            </a:r>
-          </a:p>
-          <a:p>
-            <a:pPr lvl="0" indent="0" marL="0">
-              <a:buNone/>
-            </a:pPr>
-            <a:r>
-              <a:rPr i="1"/>
-              <a:t>My partner and I both casually enjoy tennis, and we thought this would be a fun algorithm to use next time we tune in to a match. We found this amazing repository from gitHub that has records of professional matches from 1968-2024. We have chose to hone in on data from the years 2019-2023 for completeness and recency.</a:t>
-            </a:r>
-          </a:p>
-          <a:p>
-            <a:pPr lvl="0" indent="0" marL="0">
-              <a:buNone/>
-            </a:pPr>
-            <a:r>
-              <a:rPr i="1"/>
-              <a:t>Now there are a number of factors determining who will win a match of tennis. Handed-ness, endurance, play style, but remember, we are causal fans, we don’t know any of this, nor do we know the intricate rock-paper-scissors mechanics of these factors. We are assuming that you can only see what is on TV and only have the motivation to google who the underdog is in a given scenario. So, we know the player, the court surface, and the men’s professional tennis (ATP) ranking. What now?</a:t>
+            <a:pPr lvl="0"/>
+            <a:r>
+              <a:rPr/>
+              <a:t>Variance hyperparameters fit via finding MLE of Gamma distribution likelihood built on top-player posteriors: Using method </a:t>
+            </a:r>
+            <a:r>
+              <a:rPr>
+                <a:latin typeface="Courier"/>
+              </a:rPr>
+              <a:t>optim(BFGS)</a:t>
+            </a:r>
+            <a:r>
+              <a:rPr/>
+              <a:t>  </a:t>
+            </a:r>
+          </a:p>
+          <a:p>
+            <a:pPr lvl="0"/>
+            <a:r>
+              <a:rPr/>
+              <a:t>Normal hyperparameters extracted from summary statistics exactly, use mean and SD from summary of MCMC.list$statistics</a:t>
+            </a:r>
+          </a:p>
+          <a:p>
+            <a:pPr lvl="0"/>
+            <a:r>
+              <a:rPr/>
+              <a:t>Rank difference slightly lower/wider for mid players than top players</a:t>
+            </a:r>
+          </a:p>
+          <a:p>
+            <a:pPr lvl="1"/>
+            <a:r>
+              <a:rPr/>
+              <a:t>Restricted fixed effect model to only the observations with rank_diff within the center 95% of top_player rank_diff quantile(.025, .975)</a:t>
+            </a:r>
+          </a:p>
+          <a:p>
+            <a:pPr lvl="1"/>
+            <a:r>
+              <a:rPr/>
+              <a:t>Player “Martin Cuevas” had no data within this limit</a:t>
             </a:r>
           </a:p>
         </p:txBody>
       </p:sp>
     </p:spTree>
   </p:cSld>
+  <p:timing>
+    <p:tnLst>
+      <p:par>
+        <p:cTn id="1" dur="indefinite" restart="never" nodeType="tmRoot">
+          <p:childTnLst>
+            <p:seq concurrent="1" nextAc="seek">
+              <p:cTn id="2" dur="indefinite" nodeType="mainSeq">
+                <p:childTnLst>
+                  <p:par>
+                    <p:cTn id="3" fill="hold">
+                      <p:stCondLst>
+                        <p:cond delay="indefinite"/>
+                      </p:stCondLst>
+                      <p:childTnLst>
+                        <p:par>
+                          <p:cTn id="4" fill="hold">
+                            <p:stCondLst>
+                              <p:cond delay="0"/>
+                            </p:stCondLst>
+                            <p:childTnLst>
+                              <p:par>
+                                <p:cTn id="5" presetID="1" presetClass="entr" presetSubtype="0" fill="hold" grpId="0" nodeType="clickEffect">
+                                  <p:stCondLst>
+                                    <p:cond delay="0"/>
+                                  </p:stCondLst>
+                                  <p:childTnLst>
+                                    <p:set>
+                                      <p:cBhvr>
+                                        <p:cTn id="6" dur="1" fill="hold">
+                                          <p:stCondLst>
+                                            <p:cond delay="0"/>
+                                          </p:stCondLst>
+                                        </p:cTn>
+                                        <p:tgtEl>
+                                          <p:spTgt spid="3">
+                                            <p:txEl>
+                                              <p:pRg st="0" end="0"/>
+                                            </p:txEl>
+                                          </p:spTgt>
+                                        </p:tgtEl>
+                                        <p:attrNameLst>
+                                          <p:attrName>style.visibility</p:attrName>
+                                        </p:attrNameLst>
+                                      </p:cBhvr>
+                                      <p:to>
+                                        <p:strVal val="visible"/>
+                                      </p:to>
+                                    </p:set>
+                                  </p:childTnLst>
+                                </p:cTn>
+                              </p:par>
+                            </p:childTnLst>
+                          </p:cTn>
+                        </p:par>
+                      </p:childTnLst>
+                    </p:cTn>
+                  </p:par>
+                  <p:par>
+                    <p:cTn id="7" fill="hold">
+                      <p:stCondLst>
+                        <p:cond delay="indefinite"/>
+                      </p:stCondLst>
+                      <p:childTnLst>
+                        <p:par>
+                          <p:cTn id="8" fill="hold">
+                            <p:stCondLst>
+                              <p:cond delay="0"/>
+                            </p:stCondLst>
+                            <p:childTnLst>
+                              <p:par>
+                                <p:cTn id="9" presetID="1" presetClass="entr" presetSubtype="0" fill="hold" grpId="0" nodeType="clickEffect">
+                                  <p:stCondLst>
+                                    <p:cond delay="0"/>
+                                  </p:stCondLst>
+                                  <p:childTnLst>
+                                    <p:set>
+                                      <p:cBhvr>
+                                        <p:cTn id="10" dur="1" fill="hold">
+                                          <p:stCondLst>
+                                            <p:cond delay="0"/>
+                                          </p:stCondLst>
+                                        </p:cTn>
+                                        <p:tgtEl>
+                                          <p:spTgt spid="3">
+                                            <p:txEl>
+                                              <p:pRg st="1" end="1"/>
+                                            </p:txEl>
+                                          </p:spTgt>
+                                        </p:tgtEl>
+                                        <p:attrNameLst>
+                                          <p:attrName>style.visibility</p:attrName>
+                                        </p:attrNameLst>
+                                      </p:cBhvr>
+                                      <p:to>
+                                        <p:strVal val="visible"/>
+                                      </p:to>
+                                    </p:set>
+                                  </p:childTnLst>
+                                </p:cTn>
+                              </p:par>
+                            </p:childTnLst>
+                          </p:cTn>
+                        </p:par>
+                      </p:childTnLst>
+                    </p:cTn>
+                  </p:par>
+                  <p:par>
+                    <p:cTn id="11" fill="hold">
+                      <p:stCondLst>
+                        <p:cond delay="indefinite"/>
+                      </p:stCondLst>
+                      <p:childTnLst>
+                        <p:par>
+                          <p:cTn id="12" fill="hold">
+                            <p:stCondLst>
+                              <p:cond delay="0"/>
+                            </p:stCondLst>
+                            <p:childTnLst>
+                              <p:par>
+                                <p:cTn id="13" presetID="1" presetClass="entr" presetSubtype="0" fill="hold" grpId="0" nodeType="clickEffect">
+                                  <p:stCondLst>
+                                    <p:cond delay="0"/>
+                                  </p:stCondLst>
+                                  <p:childTnLst>
+                                    <p:set>
+                                      <p:cBhvr>
+                                        <p:cTn id="14" dur="1" fill="hold">
+                                          <p:stCondLst>
+                                            <p:cond delay="0"/>
+                                          </p:stCondLst>
+                                        </p:cTn>
+                                        <p:tgtEl>
+                                          <p:spTgt spid="3">
+                                            <p:txEl>
+                                              <p:pRg st="2" end="2"/>
+                                            </p:txEl>
+                                          </p:spTgt>
+                                        </p:tgtEl>
+                                        <p:attrNameLst>
+                                          <p:attrName>style.visibility</p:attrName>
+                                        </p:attrNameLst>
+                                      </p:cBhvr>
+                                      <p:to>
+                                        <p:strVal val="visible"/>
+                                      </p:to>
+                                    </p:set>
+                                  </p:childTnLst>
+                                </p:cTn>
+                              </p:par>
+                            </p:childTnLst>
+                          </p:cTn>
+                        </p:par>
+                      </p:childTnLst>
+                    </p:cTn>
+                  </p:par>
+                  <p:par>
+                    <p:cTn id="15" fill="hold">
+                      <p:stCondLst>
+                        <p:cond delay="indefinite"/>
+                      </p:stCondLst>
+                      <p:childTnLst>
+                        <p:par>
+                          <p:cTn id="16" fill="hold">
+                            <p:stCondLst>
+                              <p:cond delay="0"/>
+                            </p:stCondLst>
+                            <p:childTnLst>
+                              <p:par>
+                                <p:cTn id="17" presetID="1" presetClass="entr" presetSubtype="0" fill="hold" grpId="0" nodeType="clickEffect">
+                                  <p:stCondLst>
+                                    <p:cond delay="0"/>
+                                  </p:stCondLst>
+                                  <p:childTnLst>
+                                    <p:set>
+                                      <p:cBhvr>
+                                        <p:cTn id="18" dur="1" fill="hold">
+                                          <p:stCondLst>
+                                            <p:cond delay="0"/>
+                                          </p:stCondLst>
+                                        </p:cTn>
+                                        <p:tgtEl>
+                                          <p:spTgt spid="3">
+                                            <p:txEl>
+                                              <p:pRg st="3" end="3"/>
+                                            </p:txEl>
+                                          </p:spTgt>
+                                        </p:tgtEl>
+                                        <p:attrNameLst>
+                                          <p:attrName>style.visibility</p:attrName>
+                                        </p:attrNameLst>
+                                      </p:cBhvr>
+                                      <p:to>
+                                        <p:strVal val="visible"/>
+                                      </p:to>
+                                    </p:set>
+                                  </p:childTnLst>
+                                </p:cTn>
+                              </p:par>
+                            </p:childTnLst>
+                          </p:cTn>
+                        </p:par>
+                      </p:childTnLst>
+                    </p:cTn>
+                  </p:par>
+                  <p:par>
+                    <p:cTn id="19" fill="hold">
+                      <p:stCondLst>
+                        <p:cond delay="indefinite"/>
+                      </p:stCondLst>
+                      <p:childTnLst>
+                        <p:par>
+                          <p:cTn id="20" fill="hold">
+                            <p:stCondLst>
+                              <p:cond delay="0"/>
+                            </p:stCondLst>
+                            <p:childTnLst>
+                              <p:par>
+                                <p:cTn id="21" presetID="1" presetClass="entr" presetSubtype="0" fill="hold" grpId="0" nodeType="clickEffect">
+                                  <p:stCondLst>
+                                    <p:cond delay="0"/>
+                                  </p:stCondLst>
+                                  <p:childTnLst>
+                                    <p:set>
+                                      <p:cBhvr>
+                                        <p:cTn id="22" dur="1" fill="hold">
+                                          <p:stCondLst>
+                                            <p:cond delay="0"/>
+                                          </p:stCondLst>
+                                        </p:cTn>
+                                        <p:tgtEl>
+                                          <p:spTgt spid="3">
+                                            <p:txEl>
+                                              <p:pRg st="4" end="4"/>
+                                            </p:txEl>
+                                          </p:spTgt>
+                                        </p:tgtEl>
+                                        <p:attrNameLst>
+                                          <p:attrName>style.visibility</p:attrName>
+                                        </p:attrNameLst>
+                                      </p:cBhvr>
+                                      <p:to>
+                                        <p:strVal val="visible"/>
+                                      </p:to>
+                                    </p:set>
+                                  </p:childTnLst>
+                                </p:cTn>
+                              </p:par>
+                            </p:childTnLst>
+                          </p:cTn>
+                        </p:par>
+                      </p:childTnLst>
+                    </p:cTn>
+                  </p:par>
+                </p:childTnLst>
+              </p:cTn>
+              <p:prevCondLst>
+                <p:cond evt="onPrev" delay="0">
+                  <p:tgtEl>
+                    <p:sldTgt/>
+                  </p:tgtEl>
+                </p:cond>
+              </p:prevCondLst>
+              <p:nextCondLst>
+                <p:cond evt="onNext" delay="0">
+                  <p:tgtEl>
+                    <p:sldTgt/>
+                  </p:tgtEl>
+                </p:cond>
+              </p:nextCondLst>
+            </p:seq>
+          </p:childTnLst>
+        </p:cTn>
+      </p:par>
+    </p:tnLst>
+    <p:bldLst>
+      <p:bldP spid="3" grpId="0" uiExpand="1" build="p"/>
+    </p:bldLst>
+  </p:timing>
+</p:sld>
+</file>
+
+<file path=ppt/slides/slide18.xml><?xml version="1.0" encoding="utf-8"?>
+<p:sld xmlns:a="http://schemas.openxmlformats.org/drawingml/2006/main" xmlns:r="http://schemas.openxmlformats.org/officeDocument/2006/relationships" xmlns:p="http://schemas.openxmlformats.org/presentationml/2006/main">
+  <p:cSld>
+    <p:spTree>
+      <p:nvGrpSpPr>
+        <p:cNvPr id="1" name=""/>
+        <p:cNvGrpSpPr/>
+        <p:nvPr/>
+      </p:nvGrpSpPr>
+      <p:grpSpPr>
+        <a:xfrm>
+          <a:off x="0" y="0"/>
+          <a:ext cx="0" cy="0"/>
+          <a:chOff x="0" y="0"/>
+          <a:chExt cx="0" cy="0"/>
+        </a:xfrm>
+      </p:grpSpPr>
+      <p:sp>
+        <p:nvSpPr>
+          <p:cNvPr id="2" name="Title 1"/>
+          <p:cNvSpPr>
+            <a:spLocks noGrp="1"/>
+          </p:cNvSpPr>
+          <p:nvPr>
+            <p:ph type="title"/>
+          </p:nvPr>
+        </p:nvSpPr>
+        <p:spPr/>
+        <p:txBody>
+          <a:bodyPr/>
+          <a:lstStyle/>
+          <a:p>
+            <a:pPr lvl="0" indent="0" marL="0">
+              <a:buNone/>
+            </a:pPr>
+            <a:r>
+              <a:rPr/>
+              <a:t>Fixed effect model</a:t>
+            </a:r>
+          </a:p>
+        </p:txBody>
+      </p:sp>
+      <mc:AlternateContent xmlns:mc="http://schemas.openxmlformats.org/markup-compatibility/2006">
+        <mc:Choice xmlns:a14="http://schemas.microsoft.com/office/drawing/2010/main" Requires="a14">
+          <p:sp>
+            <p:nvSpPr>
+              <p:cNvPr id="3" name="Content Placeholder 2"/>
+              <p:cNvSpPr>
+                <a:spLocks noGrp="1"/>
+              </p:cNvSpPr>
+              <p:nvPr>
+                <p:ph idx="1"/>
+              </p:nvPr>
+            </p:nvSpPr>
+            <p:spPr/>
+            <p:txBody>
+              <a:bodyPr/>
+              <a:lstStyle/>
+              <a:p>
+                <a:pPr lvl="0"/>
+                <a:r>
+                  <a:rPr/>
+                  <a:t>4 chains, 10k burn-in, 20k samples;</a:t>
+                </a:r>
+              </a:p>
+              <a:p>
+                <a:pPr lvl="0"/>
+                <a:r>
+                  <a:rPr/>
+                  <a:t>Samples confirmed to converge via Gelman-Rubin R-hat &lt; 1.05</a:t>
+                </a:r>
+              </a:p>
+              <a:p>
+                <a:pPr lvl="0"/>
+                <a:r>
+                  <a:rPr/>
+                  <a:t>Surface encoding: 1=Clay, 2=Grass, 3=Hard (alphabetical factor levels in R)</a:t>
+                </a:r>
+              </a:p>
+              <a:p>
+                <a:pPr lvl="0"/>
+                <a:r>
+                  <a:rPr/>
+                  <a:t>For future predictions, we plugged the new values into the prediction formula rather than re-running JAGS (code on next slide) ## &gt; d.grid = data.frame(mid_df_future |&gt; select(-outcome), Est=NA, Lower=NA, Upper=NA) for ( i in 1:nrow(d.grid) ){</a:t>
+                </a:r>
+                <a:br/>
+                <a:r>
+                  <a:rPr/>
+                  <a:t>surf = d.grid</a:t>
+                </a:r>
+                <a14:m>
+                  <m:oMath xmlns:m="http://schemas.openxmlformats.org/officeDocument/2006/math">
+                    <m:r>
+                      <m:t>s</m:t>
+                    </m:r>
+                    <m:r>
+                      <m:t>u</m:t>
+                    </m:r>
+                    <m:r>
+                      <m:t>r</m:t>
+                    </m:r>
+                    <m:r>
+                      <m:t>f</m:t>
+                    </m:r>
+                    <m:r>
+                      <m:t>a</m:t>
+                    </m:r>
+                    <m:r>
+                      <m:t>c</m:t>
+                    </m:r>
+                    <m:r>
+                      <m:t>e</m:t>
+                    </m:r>
+                    <m:d>
+                      <m:dPr>
+                        <m:begChr m:val="["/>
+                        <m:sepChr m:val=""/>
+                        <m:endChr m:val="]"/>
+                        <m:grow/>
+                      </m:dPr>
+                      <m:e>
+                        <m:r>
+                          <m:t>i</m:t>
+                        </m:r>
+                      </m:e>
+                    </m:d>
+                    <m:r>
+                      <m:t>p</m:t>
+                    </m:r>
+                    <m:r>
+                      <m:t>l</m:t>
+                    </m:r>
+                    <m:r>
+                      <m:t>a</m:t>
+                    </m:r>
+                    <m:r>
+                      <m:t>y</m:t>
+                    </m:r>
+                    <m:r>
+                      <m:t>e</m:t>
+                    </m:r>
+                    <m:r>
+                      <m:t>r</m:t>
+                    </m:r>
+                    <m:r>
+                      <m:rPr>
+                        <m:sty m:val="p"/>
+                      </m:rPr>
+                      <m:t>=</m:t>
+                    </m:r>
+                    <m:r>
+                      <m:t>d</m:t>
+                    </m:r>
+                    <m:r>
+                      <m:rPr>
+                        <m:sty m:val="p"/>
+                      </m:rPr>
+                      <m:t>.</m:t>
+                    </m:r>
+                    <m:r>
+                      <m:t>g</m:t>
+                    </m:r>
+                    <m:r>
+                      <m:t>r</m:t>
+                    </m:r>
+                    <m:r>
+                      <m:t>i</m:t>
+                    </m:r>
+                    <m:r>
+                      <m:t>d</m:t>
+                    </m:r>
+                  </m:oMath>
+                </a14:m>
+                <a:r>
+                  <a:rPr/>
+                  <a:t>player[i] mu = rez[,paste0(“alpha[”, surf, ”]”)] + rez[,“beta”]*d.grid</a:t>
+                </a:r>
+                <a:r>
+                  <a:rPr/>
+                  <a:t>$rank_diff[i] +
+  rez[,paste0("A[", player, "]")] +
+  rez[,paste0("B[", player, ",", surf, "]")]
+pr = 1/(1+exp(-mu))
+d.grid[i,c("Est", "Lower", "Upper")] = round(quantile(pr, p=c(0.5, 0.025, 0.975)), 3)
+}
+Results = data.frame(mid_df_future$</a:t>
+                </a:r>
+                <a:r>
+                  <a:rPr/>
+                  <a:t>outcome, d.grid)</a:t>
+                </a:r>
+              </a:p>
+            </p:txBody>
+          </p:sp>
+        </mc:Choice>
+      </mc:AlternateContent>
+    </p:spTree>
+  </p:cSld>
+  <p:timing>
+    <p:tnLst>
+      <p:par>
+        <p:cTn id="1" dur="indefinite" restart="never" nodeType="tmRoot">
+          <p:childTnLst>
+            <p:seq concurrent="1" nextAc="seek">
+              <p:cTn id="2" dur="indefinite" nodeType="mainSeq">
+                <p:childTnLst>
+                  <p:par>
+                    <p:cTn id="3" fill="hold">
+                      <p:stCondLst>
+                        <p:cond delay="indefinite"/>
+                      </p:stCondLst>
+                      <p:childTnLst>
+                        <p:par>
+                          <p:cTn id="4" fill="hold">
+                            <p:stCondLst>
+                              <p:cond delay="0"/>
+                            </p:stCondLst>
+                            <p:childTnLst>
+                              <p:par>
+                                <p:cTn id="5" presetID="1" presetClass="entr" presetSubtype="0" fill="hold" grpId="0" nodeType="clickEffect">
+                                  <p:stCondLst>
+                                    <p:cond delay="0"/>
+                                  </p:stCondLst>
+                                  <p:childTnLst>
+                                    <p:set>
+                                      <p:cBhvr>
+                                        <p:cTn id="6" dur="1" fill="hold">
+                                          <p:stCondLst>
+                                            <p:cond delay="0"/>
+                                          </p:stCondLst>
+                                        </p:cTn>
+                                        <p:tgtEl>
+                                          <p:spTgt spid="3">
+                                            <p:txEl>
+                                              <p:pRg st="0" end="0"/>
+                                            </p:txEl>
+                                          </p:spTgt>
+                                        </p:tgtEl>
+                                        <p:attrNameLst>
+                                          <p:attrName>style.visibility</p:attrName>
+                                        </p:attrNameLst>
+                                      </p:cBhvr>
+                                      <p:to>
+                                        <p:strVal val="visible"/>
+                                      </p:to>
+                                    </p:set>
+                                  </p:childTnLst>
+                                </p:cTn>
+                              </p:par>
+                            </p:childTnLst>
+                          </p:cTn>
+                        </p:par>
+                      </p:childTnLst>
+                    </p:cTn>
+                  </p:par>
+                  <p:par>
+                    <p:cTn id="7" fill="hold">
+                      <p:stCondLst>
+                        <p:cond delay="indefinite"/>
+                      </p:stCondLst>
+                      <p:childTnLst>
+                        <p:par>
+                          <p:cTn id="8" fill="hold">
+                            <p:stCondLst>
+                              <p:cond delay="0"/>
+                            </p:stCondLst>
+                            <p:childTnLst>
+                              <p:par>
+                                <p:cTn id="9" presetID="1" presetClass="entr" presetSubtype="0" fill="hold" grpId="0" nodeType="clickEffect">
+                                  <p:stCondLst>
+                                    <p:cond delay="0"/>
+                                  </p:stCondLst>
+                                  <p:childTnLst>
+                                    <p:set>
+                                      <p:cBhvr>
+                                        <p:cTn id="10" dur="1" fill="hold">
+                                          <p:stCondLst>
+                                            <p:cond delay="0"/>
+                                          </p:stCondLst>
+                                        </p:cTn>
+                                        <p:tgtEl>
+                                          <p:spTgt spid="3">
+                                            <p:txEl>
+                                              <p:pRg st="1" end="1"/>
+                                            </p:txEl>
+                                          </p:spTgt>
+                                        </p:tgtEl>
+                                        <p:attrNameLst>
+                                          <p:attrName>style.visibility</p:attrName>
+                                        </p:attrNameLst>
+                                      </p:cBhvr>
+                                      <p:to>
+                                        <p:strVal val="visible"/>
+                                      </p:to>
+                                    </p:set>
+                                  </p:childTnLst>
+                                </p:cTn>
+                              </p:par>
+                            </p:childTnLst>
+                          </p:cTn>
+                        </p:par>
+                      </p:childTnLst>
+                    </p:cTn>
+                  </p:par>
+                  <p:par>
+                    <p:cTn id="11" fill="hold">
+                      <p:stCondLst>
+                        <p:cond delay="indefinite"/>
+                      </p:stCondLst>
+                      <p:childTnLst>
+                        <p:par>
+                          <p:cTn id="12" fill="hold">
+                            <p:stCondLst>
+                              <p:cond delay="0"/>
+                            </p:stCondLst>
+                            <p:childTnLst>
+                              <p:par>
+                                <p:cTn id="13" presetID="1" presetClass="entr" presetSubtype="0" fill="hold" grpId="0" nodeType="clickEffect">
+                                  <p:stCondLst>
+                                    <p:cond delay="0"/>
+                                  </p:stCondLst>
+                                  <p:childTnLst>
+                                    <p:set>
+                                      <p:cBhvr>
+                                        <p:cTn id="14" dur="1" fill="hold">
+                                          <p:stCondLst>
+                                            <p:cond delay="0"/>
+                                          </p:stCondLst>
+                                        </p:cTn>
+                                        <p:tgtEl>
+                                          <p:spTgt spid="3">
+                                            <p:txEl>
+                                              <p:pRg st="2" end="2"/>
+                                            </p:txEl>
+                                          </p:spTgt>
+                                        </p:tgtEl>
+                                        <p:attrNameLst>
+                                          <p:attrName>style.visibility</p:attrName>
+                                        </p:attrNameLst>
+                                      </p:cBhvr>
+                                      <p:to>
+                                        <p:strVal val="visible"/>
+                                      </p:to>
+                                    </p:set>
+                                  </p:childTnLst>
+                                </p:cTn>
+                              </p:par>
+                            </p:childTnLst>
+                          </p:cTn>
+                        </p:par>
+                      </p:childTnLst>
+                    </p:cTn>
+                  </p:par>
+                  <p:par>
+                    <p:cTn id="15" fill="hold">
+                      <p:stCondLst>
+                        <p:cond delay="indefinite"/>
+                      </p:stCondLst>
+                      <p:childTnLst>
+                        <p:par>
+                          <p:cTn id="16" fill="hold">
+                            <p:stCondLst>
+                              <p:cond delay="0"/>
+                            </p:stCondLst>
+                            <p:childTnLst>
+                              <p:par>
+                                <p:cTn id="17" presetID="1" presetClass="entr" presetSubtype="0" fill="hold" grpId="0" nodeType="clickEffect">
+                                  <p:stCondLst>
+                                    <p:cond delay="0"/>
+                                  </p:stCondLst>
+                                  <p:childTnLst>
+                                    <p:set>
+                                      <p:cBhvr>
+                                        <p:cTn id="18" dur="1" fill="hold">
+                                          <p:stCondLst>
+                                            <p:cond delay="0"/>
+                                          </p:stCondLst>
+                                        </p:cTn>
+                                        <p:tgtEl>
+                                          <p:spTgt spid="3">
+                                            <p:txEl>
+                                              <p:pRg st="3" end="3"/>
+                                            </p:txEl>
+                                          </p:spTgt>
+                                        </p:tgtEl>
+                                        <p:attrNameLst>
+                                          <p:attrName>style.visibility</p:attrName>
+                                        </p:attrNameLst>
+                                      </p:cBhvr>
+                                      <p:to>
+                                        <p:strVal val="visible"/>
+                                      </p:to>
+                                    </p:set>
+                                  </p:childTnLst>
+                                </p:cTn>
+                              </p:par>
+                            </p:childTnLst>
+                          </p:cTn>
+                        </p:par>
+                      </p:childTnLst>
+                    </p:cTn>
+                  </p:par>
+                </p:childTnLst>
+              </p:cTn>
+              <p:prevCondLst>
+                <p:cond evt="onPrev" delay="0">
+                  <p:tgtEl>
+                    <p:sldTgt/>
+                  </p:tgtEl>
+                </p:cond>
+              </p:prevCondLst>
+              <p:nextCondLst>
+                <p:cond evt="onNext" delay="0">
+                  <p:tgtEl>
+                    <p:sldTgt/>
+                  </p:tgtEl>
+                </p:cond>
+              </p:nextCondLst>
+            </p:seq>
+          </p:childTnLst>
+        </p:cTn>
+      </p:par>
+    </p:tnLst>
+    <p:bldLst>
+      <p:bldP spid="3" grpId="0" uiExpand="1" build="p"/>
+    </p:bldLst>
+  </p:timing>
 </p:sld>
 </file>
 
@@ -6875,6 +7714,24 @@
                       <m:rPr>
                         <m:sty m:val="p"/>
                       </m:rPr>
+                      <m:t>,</m:t>
+                    </m:r>
+                    <m:sSub>
+                      <m:e>
+                        <m:r>
+                          <m:t>α</m:t>
+                        </m:r>
+                      </m:e>
+                      <m:sub>
+                        <m:r>
+                          <m:t>i</m:t>
+                        </m:r>
+                      </m:sub>
+                    </m:sSub>
+                    <m:r>
+                      <m:rPr>
+                        <m:sty m:val="p"/>
+                      </m:rPr>
                       <m:t>∼</m:t>
                     </m:r>
                     <m:r>
@@ -6915,7 +7772,64 @@
                 </a14:m>
                 <a:r>
                   <a:rPr/>
-                  <a:t>: Vague prior on player match-up (rank difference)</a:t>
+                  <a:t>: Vague priors on player match-up (rank difference) and surface effect</a:t>
+                </a:r>
+              </a:p>
+              <a:p>
+                <a:pPr lvl="1"/>
+                <a14:m>
+                  <m:oMath xmlns:m="http://schemas.openxmlformats.org/officeDocument/2006/math">
+                    <m:sSubSup>
+                      <m:e>
+                        <m:r>
+                          <m:t>σ</m:t>
+                        </m:r>
+                      </m:e>
+                      <m:sub>
+                        <m:r>
+                          <m:t>A</m:t>
+                        </m:r>
+                      </m:sub>
+                      <m:sup>
+                        <m:r>
+                          <m:t>2</m:t>
+                        </m:r>
+                      </m:sup>
+                    </m:sSubSup>
+                    <m:r>
+                      <m:rPr>
+                        <m:sty m:val="p"/>
+                      </m:rPr>
+                      <m:t>,</m:t>
+                    </m:r>
+                    <m:sSubSup>
+                      <m:e>
+                        <m:r>
+                          <m:t>σ</m:t>
+                        </m:r>
+                      </m:e>
+                      <m:sub>
+                        <m:r>
+                          <m:t>B</m:t>
+                        </m:r>
+                      </m:sub>
+                      <m:sup>
+                        <m:r>
+                          <m:t>2</m:t>
+                        </m:r>
+                      </m:sup>
+                    </m:sSubSup>
+                    <m:r>
+                      <m:rPr>
+                        <m:sty m:val="p"/>
+                      </m:rPr>
+                      <m:t>∼</m:t>
+                    </m:r>
+                  </m:oMath>
+                </a14:m>
+                <a:r>
+                  <a:rPr/>
+                  <a:t> Half Cauchy</a:t>
                 </a:r>
               </a:p>
               <a:p>
@@ -7184,6 +8098,55 @@
                       </p:childTnLst>
                     </p:cTn>
                   </p:par>
+                  <p:par>
+                    <p:cTn id="23" fill="hold">
+                      <p:stCondLst>
+                        <p:cond delay="indefinite"/>
+                      </p:stCondLst>
+                      <p:childTnLst>
+                        <p:par>
+                          <p:cTn id="24" fill="hold">
+                            <p:stCondLst>
+                              <p:cond delay="0"/>
+                            </p:stCondLst>
+                            <p:childTnLst>
+                              <p:par>
+                                <p:cTn id="25" presetID="1" presetClass="entr" presetSubtype="0" fill="hold" grpId="0" nodeType="clickEffect">
+                                  <p:stCondLst>
+                                    <p:cond delay="0"/>
+                                  </p:stCondLst>
+                                  <p:childTnLst>
+                                    <p:set>
+                                      <p:cBhvr>
+                                        <p:cTn id="26" dur="1" fill="hold">
+                                          <p:stCondLst>
+                                            <p:cond delay="0"/>
+                                          </p:stCondLst>
+                                        </p:cTn>
+                                        <p:tgtEl>
+                                          <p:spTgt spid="3">
+                                            <p:txEl>
+                                              <p:pRg st="5" end="5"/>
+                                            </p:txEl>
+                                          </p:spTgt>
+                                        </p:tgtEl>
+                                        <p:attrNameLst>
+                                          <p:attrName>style.visibility</p:attrName>
+                                        </p:attrNameLst>
+                                      </p:cBhvr>
+                                      <p:to>
+                                        <p:strVal val="visible"/>
+                                      </p:to>
+                                    </p:set>
+                                  </p:childTnLst>
+                                </p:cTn>
+                              </p:par>
+                            </p:childTnLst>
+                          </p:cTn>
+                        </p:par>
+                      </p:childTnLst>
+                    </p:cTn>
+                  </p:par>
                 </p:childTnLst>
               </p:cTn>
               <p:prevCondLst>
@@ -7286,7 +8249,7 @@
             <a:pPr lvl="0"/>
             <a:r>
               <a:rPr/>
-              <a:t>Players are mutually independent</a:t>
+              <a:t>Players are mutually independent  </a:t>
             </a:r>
           </a:p>
         </p:txBody>
@@ -7518,50 +8481,89 @@
           </a:p>
         </p:txBody>
       </p:sp>
-      <p:sp>
-        <p:nvSpPr>
-          <p:cNvPr id="3" name="Content Placeholder 2"/>
-          <p:cNvSpPr>
-            <a:spLocks noGrp="1"/>
-          </p:cNvSpPr>
-          <p:nvPr>
-            <p:ph idx="1"/>
-          </p:nvPr>
-        </p:nvSpPr>
-        <p:spPr/>
-        <p:txBody>
-          <a:bodyPr/>
-          <a:lstStyle/>
-          <a:p>
-            <a:pPr lvl="0"/>
-            <a:r>
-              <a:rPr/>
-              <a:t>SSVS determined</a:t>
-            </a:r>
-          </a:p>
-          <a:p>
-            <a:pPr lvl="0"/>
-            <a:r>
-              <a:rPr/>
-              <a:t>surface effect is significant</a:t>
-            </a:r>
-          </a:p>
-          <a:p>
-            <a:pPr lvl="0"/>
-            <a:r>
-              <a:rPr/>
-              <a:t>Rank difference is a significant positive predictor of winning probability</a:t>
-            </a:r>
-          </a:p>
-          <a:p>
-            <a:pPr lvl="0"/>
-            <a:r>
-              <a:rPr/>
-              <a:t>DIC comparison between models to determine interaction is significant</a:t>
-            </a:r>
-          </a:p>
-        </p:txBody>
-      </p:sp>
+      <mc:AlternateContent xmlns:mc="http://schemas.openxmlformats.org/markup-compatibility/2006">
+        <mc:Choice xmlns:a14="http://schemas.microsoft.com/office/drawing/2010/main" Requires="a14">
+          <p:sp>
+            <p:nvSpPr>
+              <p:cNvPr id="3" name="Content Placeholder 2"/>
+              <p:cNvSpPr>
+                <a:spLocks noGrp="1"/>
+              </p:cNvSpPr>
+              <p:nvPr>
+                <p:ph idx="1"/>
+              </p:nvPr>
+            </p:nvSpPr>
+            <p:spPr/>
+            <p:txBody>
+              <a:bodyPr/>
+              <a:lstStyle/>
+              <a:p>
+                <a:pPr lvl="0"/>
+                <a:r>
+                  <a:rPr/>
+                  <a:t>SSVS determined that surface effect is significant</a:t>
+                </a:r>
+              </a:p>
+              <a:p>
+                <a:pPr lvl="0"/>
+                <a:r>
+                  <a:rPr/>
+                  <a:t>Rank difference is a significant positive predictor of winning probability</a:t>
+                </a:r>
+              </a:p>
+              <a:p>
+                <a:pPr lvl="0"/>
+                <a:r>
+                  <a:rPr/>
+                  <a:t>Prob</a:t>
+                </a:r>
+                <a14:m>
+                  <m:oMath xmlns:m="http://schemas.openxmlformats.org/officeDocument/2006/math">
+                    <m:d>
+                      <m:dPr>
+                        <m:begChr m:val="("/>
+                        <m:sepChr m:val=""/>
+                        <m:endChr m:val=")"/>
+                        <m:grow/>
+                      </m:dPr>
+                      <m:e>
+                        <m:r>
+                          <m:t>β</m:t>
+                        </m:r>
+                        <m:r>
+                          <m:rPr>
+                            <m:sty m:val="p"/>
+                          </m:rPr>
+                          <m:t>&gt;</m:t>
+                        </m:r>
+                        <m:r>
+                          <m:t>0</m:t>
+                        </m:r>
+                      </m:e>
+                    </m:d>
+                    <m:r>
+                      <m:rPr>
+                        <m:sty m:val="p"/>
+                      </m:rPr>
+                      <m:t>=</m:t>
+                    </m:r>
+                    <m:r>
+                      <m:t>1</m:t>
+                    </m:r>
+                  </m:oMath>
+                </a14:m>
+              </a:p>
+              <a:p>
+                <a:pPr lvl="0"/>
+                <a:r>
+                  <a:rPr/>
+                  <a:t>DIC comparison between models to determine interaction is significant</a:t>
+                </a:r>
+              </a:p>
+            </p:txBody>
+          </p:sp>
+        </mc:Choice>
+      </mc:AlternateContent>
     </p:spTree>
   </p:cSld>
   <p:timing>
